--- a/pptx-creation-plugin/examples/financial-analysis/out/deck.pptx
+++ b/pptx-creation-plugin/examples/financial-analysis/out/deck.pptx
@@ -922,7 +922,8 @@
           <a:p>
             <a:r>
               <a:rPr lang="en-US" dirty="0"/>
-              <a:t>1スライド1メッセージ。良いニュース（増収増益）と論点（原価）を一文で。</a:t>
+              <a:t>1スライド1メッセージ。良いニュース（増収増益）と論点（原価）を一文で。
+【分解】項目=1（結論文） ／ 関係1語=単一の主張 ／ 量=前年比は口頭 ／ 主役=2行目の論点 ／ 既知→未知=良い結果（既知の期待）→原価の論点（未知）</a:t>
             </a:r>
             <a:endParaRPr lang="en-US" dirty="0"/>
           </a:p>
@@ -1098,7 +1099,8 @@
           <a:p>
             <a:r>
               <a:rPr lang="en-US" dirty="0"/>
-              <a:t>KPIサマリー。利益率を強調カードに。各カードに前年比を併記して文脈を出す。</a:t>
+              <a:t>KPIサマリー。利益率を強調カードに。各カードに前年比を併記して文脈を出す。
+【分解】項目=4（売上・営業利益・利益率・受注残） ／ 関係1語=並列（KPIの列挙、順序なし） ／ 量=各値+前年比 ／ 主役=利益率カード（emphasis） ／ 既知→未知=実績（既知）→利益率の改善（伝えたい未知）</a:t>
             </a:r>
             <a:endParaRPr lang="en-US" dirty="0"/>
           </a:p>
@@ -1186,7 +1188,8 @@
           <a:p>
             <a:r>
               <a:rPr lang="en-US" dirty="0"/>
-              <a:t>ネイティブ縦棒。単位は系列名に明記。前年同四半期比は口頭/テキストで補足。</a:t>
+              <a:t>ネイティブ縦棒。単位は系列名に明記。前年同四半期比は口頭/テキストで補足。
+【分解】項目=6四半期 ／ 関係1語=推移（時系列） ／ 量=四半期売上の実数・比例が論点 ／ 主役=直近四半期の加速 ／ 既知→未知=過去の実績→直近の変化</a:t>
             </a:r>
             <a:endParaRPr lang="en-US" dirty="0"/>
           </a:p>
@@ -1274,7 +1277,8 @@
           <a:p>
             <a:r>
               <a:rPr lang="en-US" dirty="0"/>
-              <a:t>ネイティブ表（編集可）。数値列は自動で右寄せ。前提・単位はnoteで明示し誤読を防ぐ。</a:t>
+              <a:t>ネイティブ表（編集可）。数値列は自動で右寄せ。前提・単位はnoteで明示し誤読を防ぐ。
+【分解】項目=セグメント×指標の行列 ／ 関係1語=精密な対応（行×列） ／ 量=実数（単位・前提はnote） ／ 主役=産業機械の行（結論行を先頭に＝系列位置） ／ 既知→未知=全社計（既知）→源泉の分解（未知）</a:t>
             </a:r>
             <a:endParaRPr lang="en-US" dirty="0"/>
           </a:p>
